--- a/.copilot-tracking/ppt/2026-09-11/zava-forward-cxo-introduction/final/zava-forward-cxo-executive-presentation.pptx
+++ b/.copilot-tracking/ppt/2026-09-11/zava-forward-cxo-introduction/final/zava-forward-cxo-executive-presentation.pptx
@@ -6776,8 +6776,8 @@
         </p:nvSpPr>
         <p:spPr>
           <a:xfrm>
-            <a:off x="11049000" y="109728"/>
-            <a:ext cx="960120" cy="335445"/>
+            <a:off x="11231880" y="91440"/>
+            <a:ext cx="777240" cy="271551"/>
           </a:xfrm>
           <a:prstGeom prst="rect">
             <a:avLst/>
@@ -6827,8 +6827,8 @@
         </p:blipFill>
         <p:spPr>
           <a:xfrm>
-            <a:off x="11049000" y="109728"/>
-            <a:ext cx="960120" cy="335446"/>
+            <a:off x="11231880" y="91440"/>
+            <a:ext cx="777240" cy="271551"/>
           </a:xfrm>
           <a:prstGeom prst="rect">
             <a:avLst/>
@@ -7389,8 +7389,8 @@
         </p:nvSpPr>
         <p:spPr>
           <a:xfrm>
-            <a:off x="11049000" y="109728"/>
-            <a:ext cx="960120" cy="335445"/>
+            <a:off x="11231880" y="91440"/>
+            <a:ext cx="777240" cy="271551"/>
           </a:xfrm>
           <a:prstGeom prst="rect">
             <a:avLst/>
@@ -7440,8 +7440,8 @@
         </p:blipFill>
         <p:spPr>
           <a:xfrm>
-            <a:off x="11049000" y="109728"/>
-            <a:ext cx="960120" cy="335446"/>
+            <a:off x="11231880" y="91440"/>
+            <a:ext cx="777240" cy="271551"/>
           </a:xfrm>
           <a:prstGeom prst="rect">
             <a:avLst/>
@@ -8498,8 +8498,8 @@
         </p:nvSpPr>
         <p:spPr>
           <a:xfrm>
-            <a:off x="11049000" y="109728"/>
-            <a:ext cx="960120" cy="335445"/>
+            <a:off x="11231880" y="91440"/>
+            <a:ext cx="777240" cy="271551"/>
           </a:xfrm>
           <a:prstGeom prst="rect">
             <a:avLst/>
@@ -8549,8 +8549,8 @@
         </p:blipFill>
         <p:spPr>
           <a:xfrm>
-            <a:off x="11049000" y="109728"/>
-            <a:ext cx="960120" cy="335446"/>
+            <a:off x="11231880" y="91440"/>
+            <a:ext cx="777240" cy="271551"/>
           </a:xfrm>
           <a:prstGeom prst="rect">
             <a:avLst/>
@@ -9435,8 +9435,8 @@
         </p:nvSpPr>
         <p:spPr>
           <a:xfrm>
-            <a:off x="11049000" y="109728"/>
-            <a:ext cx="960120" cy="335445"/>
+            <a:off x="11231880" y="91440"/>
+            <a:ext cx="777240" cy="271551"/>
           </a:xfrm>
           <a:prstGeom prst="rect">
             <a:avLst/>
@@ -9486,8 +9486,8 @@
         </p:blipFill>
         <p:spPr>
           <a:xfrm>
-            <a:off x="11049000" y="109728"/>
-            <a:ext cx="960120" cy="335446"/>
+            <a:off x="11231880" y="91440"/>
+            <a:ext cx="777240" cy="271551"/>
           </a:xfrm>
           <a:prstGeom prst="rect">
             <a:avLst/>
@@ -10649,8 +10649,8 @@
         </p:nvSpPr>
         <p:spPr>
           <a:xfrm>
-            <a:off x="11049000" y="109728"/>
-            <a:ext cx="960120" cy="335445"/>
+            <a:off x="11231880" y="91440"/>
+            <a:ext cx="777240" cy="271551"/>
           </a:xfrm>
           <a:prstGeom prst="rect">
             <a:avLst/>
@@ -10700,8 +10700,8 @@
         </p:blipFill>
         <p:spPr>
           <a:xfrm>
-            <a:off x="11049000" y="109728"/>
-            <a:ext cx="960120" cy="335446"/>
+            <a:off x="11231880" y="91440"/>
+            <a:ext cx="777240" cy="271551"/>
           </a:xfrm>
           <a:prstGeom prst="rect">
             <a:avLst/>
@@ -11501,8 +11501,8 @@
         </p:nvSpPr>
         <p:spPr>
           <a:xfrm>
-            <a:off x="11049000" y="109728"/>
-            <a:ext cx="960120" cy="335445"/>
+            <a:off x="11231880" y="91440"/>
+            <a:ext cx="777240" cy="271551"/>
           </a:xfrm>
           <a:prstGeom prst="rect">
             <a:avLst/>
@@ -11552,8 +11552,8 @@
         </p:blipFill>
         <p:spPr>
           <a:xfrm>
-            <a:off x="11049000" y="109728"/>
-            <a:ext cx="960120" cy="335446"/>
+            <a:off x="11231880" y="91440"/>
+            <a:ext cx="777240" cy="271551"/>
           </a:xfrm>
           <a:prstGeom prst="rect">
             <a:avLst/>
@@ -12629,8 +12629,8 @@
         </p:nvSpPr>
         <p:spPr>
           <a:xfrm>
-            <a:off x="11049000" y="109728"/>
-            <a:ext cx="960120" cy="335445"/>
+            <a:off x="11231880" y="91440"/>
+            <a:ext cx="777240" cy="271551"/>
           </a:xfrm>
           <a:prstGeom prst="rect">
             <a:avLst/>
@@ -12680,8 +12680,8 @@
         </p:blipFill>
         <p:spPr>
           <a:xfrm>
-            <a:off x="11049000" y="109728"/>
-            <a:ext cx="960120" cy="335446"/>
+            <a:off x="11231880" y="91440"/>
+            <a:ext cx="777240" cy="271551"/>
           </a:xfrm>
           <a:prstGeom prst="rect">
             <a:avLst/>
@@ -13832,8 +13832,8 @@
         </p:nvSpPr>
         <p:spPr>
           <a:xfrm>
-            <a:off x="11049000" y="109728"/>
-            <a:ext cx="960120" cy="335445"/>
+            <a:off x="11231880" y="91440"/>
+            <a:ext cx="777240" cy="271551"/>
           </a:xfrm>
           <a:prstGeom prst="rect">
             <a:avLst/>
@@ -13883,8 +13883,8 @@
         </p:blipFill>
         <p:spPr>
           <a:xfrm>
-            <a:off x="11049000" y="109728"/>
-            <a:ext cx="960120" cy="335446"/>
+            <a:off x="11231880" y="91440"/>
+            <a:ext cx="777240" cy="271551"/>
           </a:xfrm>
           <a:prstGeom prst="rect">
             <a:avLst/>
@@ -14626,8 +14626,8 @@
         </p:nvSpPr>
         <p:spPr>
           <a:xfrm>
-            <a:off x="11049000" y="109728"/>
-            <a:ext cx="960120" cy="335445"/>
+            <a:off x="11231880" y="91440"/>
+            <a:ext cx="777240" cy="271551"/>
           </a:xfrm>
           <a:prstGeom prst="rect">
             <a:avLst/>
@@ -14677,8 +14677,8 @@
         </p:blipFill>
         <p:spPr>
           <a:xfrm>
-            <a:off x="11049000" y="109728"/>
-            <a:ext cx="960120" cy="335446"/>
+            <a:off x="11231880" y="91440"/>
+            <a:ext cx="777240" cy="271551"/>
           </a:xfrm>
           <a:prstGeom prst="rect">
             <a:avLst/>
@@ -15822,8 +15822,8 @@
         </p:nvSpPr>
         <p:spPr>
           <a:xfrm>
-            <a:off x="11049000" y="109728"/>
-            <a:ext cx="960120" cy="335445"/>
+            <a:off x="11231880" y="91440"/>
+            <a:ext cx="777240" cy="271551"/>
           </a:xfrm>
           <a:prstGeom prst="rect">
             <a:avLst/>
@@ -15873,8 +15873,8 @@
         </p:blipFill>
         <p:spPr>
           <a:xfrm>
-            <a:off x="11049000" y="109728"/>
-            <a:ext cx="960120" cy="335446"/>
+            <a:off x="11231880" y="91440"/>
+            <a:ext cx="777240" cy="271551"/>
           </a:xfrm>
           <a:prstGeom prst="rect">
             <a:avLst/>
@@ -16988,8 +16988,8 @@
         </p:nvSpPr>
         <p:spPr>
           <a:xfrm>
-            <a:off x="11049000" y="109728"/>
-            <a:ext cx="960120" cy="335445"/>
+            <a:off x="11231880" y="91440"/>
+            <a:ext cx="777240" cy="271551"/>
           </a:xfrm>
           <a:prstGeom prst="rect">
             <a:avLst/>
@@ -17039,8 +17039,8 @@
         </p:blipFill>
         <p:spPr>
           <a:xfrm>
-            <a:off x="11049000" y="109728"/>
-            <a:ext cx="960120" cy="335446"/>
+            <a:off x="11231880" y="91440"/>
+            <a:ext cx="777240" cy="271551"/>
           </a:xfrm>
           <a:prstGeom prst="rect">
             <a:avLst/>
@@ -17553,8 +17553,8 @@
         </p:nvSpPr>
         <p:spPr>
           <a:xfrm>
-            <a:off x="11049000" y="109728"/>
-            <a:ext cx="960120" cy="335445"/>
+            <a:off x="11231880" y="91440"/>
+            <a:ext cx="777240" cy="271551"/>
           </a:xfrm>
           <a:prstGeom prst="rect">
             <a:avLst/>
@@ -17604,8 +17604,8 @@
         </p:blipFill>
         <p:spPr>
           <a:xfrm>
-            <a:off x="11049000" y="109728"/>
-            <a:ext cx="960120" cy="335446"/>
+            <a:off x="11231880" y="91440"/>
+            <a:ext cx="777240" cy="271551"/>
           </a:xfrm>
           <a:prstGeom prst="rect">
             <a:avLst/>
@@ -18499,8 +18499,8 @@
         </p:nvSpPr>
         <p:spPr>
           <a:xfrm>
-            <a:off x="11049000" y="109728"/>
-            <a:ext cx="960120" cy="335445"/>
+            <a:off x="11231880" y="91440"/>
+            <a:ext cx="777240" cy="271551"/>
           </a:xfrm>
           <a:prstGeom prst="rect">
             <a:avLst/>
@@ -18550,8 +18550,8 @@
         </p:blipFill>
         <p:spPr>
           <a:xfrm>
-            <a:off x="11049000" y="109728"/>
-            <a:ext cx="960120" cy="335446"/>
+            <a:off x="11231880" y="91440"/>
+            <a:ext cx="777240" cy="271551"/>
           </a:xfrm>
           <a:prstGeom prst="rect">
             <a:avLst/>
@@ -19434,8 +19434,8 @@
         </p:nvSpPr>
         <p:spPr>
           <a:xfrm>
-            <a:off x="11049000" y="109728"/>
-            <a:ext cx="960120" cy="335445"/>
+            <a:off x="11231880" y="91440"/>
+            <a:ext cx="777240" cy="271551"/>
           </a:xfrm>
           <a:prstGeom prst="rect">
             <a:avLst/>
@@ -19485,8 +19485,8 @@
         </p:blipFill>
         <p:spPr>
           <a:xfrm>
-            <a:off x="11049000" y="109728"/>
-            <a:ext cx="960120" cy="335446"/>
+            <a:off x="11231880" y="91440"/>
+            <a:ext cx="777240" cy="271551"/>
           </a:xfrm>
           <a:prstGeom prst="rect">
             <a:avLst/>
